--- a/docs/AI_Dev_Flow_Presentazione_Team.pptx
+++ b/docs/AI_Dev_Flow_Presentazione_Team.pptx
@@ -2134,7 +2134,7 @@
                 <a:ea typeface="Calibri" pitchFamily="34" charset="-122"/>
                 <a:cs typeface="Calibri" pitchFamily="34" charset="-120"/>
               </a:rPr>
-              <a:t>versione 0.0.7</a:t>
+              <a:t>versione 0.0.8</a:t>
             </a:r>
             <a:endParaRPr lang="en-US" sz="1300" dirty="0"/>
           </a:p>
@@ -6946,7 +6946,7 @@
                 <a:ea typeface="Calibri" pitchFamily="34" charset="-122"/>
                 <a:cs typeface="Calibri" pitchFamily="34" charset="-120"/>
               </a:rPr>
-              <a:t>“Lavora su questo ticket: &lt;url&gt;” — l'orchestratore guida le 6 fasi; tu decidi ai 3 gate. Ti interrompi? Si riprende da dov'era.</a:t>
+              <a:t>“Lavora su questo ticket: &lt;url&gt;” — loop deterministico: flowState next → esegui → registra. Tu decidi ai 3 gate; ti interrompi? si riprende da dov'era.</a:t>
             </a:r>
             <a:endParaRPr lang="en-US" sz="1050" dirty="0"/>
           </a:p>
